--- a/自学/マーケティング基礎/02_誰のニーズを満たすのか.pptx
+++ b/自学/マーケティング基礎/02_誰のニーズを満たすのか.pptx
@@ -248,7 +248,7 @@
           <a:p>
             <a:fld id="{70D25CD4-97A0-4A8B-8B68-79239C598E73}" type="datetimeFigureOut">
               <a:rPr kumimoji="1" lang="ja-JP" altLang="en-US" smtClean="0"/>
-              <a:t>2026/4/12</a:t>
+              <a:t>2026/4/15</a:t>
             </a:fld>
             <a:endParaRPr kumimoji="1" lang="ja-JP" altLang="en-US"/>
           </a:p>
@@ -632,6 +632,58 @@
             <a:endParaRPr lang="en-US" altLang="ja-JP" dirty="0"/>
           </a:p>
           <a:p>
+            <a:pPr marL="0" marR="0" lvl="0" indent="0" algn="l" defTabSz="914400" rtl="0" eaLnBrk="1" fontAlgn="auto" latinLnBrk="0" hangingPunct="1">
+              <a:lnSpc>
+                <a:spcPct val="100000"/>
+              </a:lnSpc>
+              <a:spcBef>
+                <a:spcPts val="0"/>
+              </a:spcBef>
+              <a:spcAft>
+                <a:spcPts val="0"/>
+              </a:spcAft>
+              <a:buClrTx/>
+              <a:buSzTx/>
+              <a:buFontTx/>
+              <a:buNone/>
+              <a:tabLst/>
+              <a:defRPr/>
+            </a:pPr>
+            <a:endParaRPr lang="en-US" altLang="ja-JP" dirty="0"/>
+          </a:p>
+          <a:p>
+            <a:pPr marL="0" marR="0" lvl="0" indent="0" algn="l" defTabSz="914400" rtl="0" eaLnBrk="1" fontAlgn="auto" latinLnBrk="0" hangingPunct="1">
+              <a:lnSpc>
+                <a:spcPct val="100000"/>
+              </a:lnSpc>
+              <a:spcBef>
+                <a:spcPts val="0"/>
+              </a:spcBef>
+              <a:spcAft>
+                <a:spcPts val="0"/>
+              </a:spcAft>
+              <a:buClrTx/>
+              <a:buSzTx/>
+              <a:buFontTx/>
+              <a:buNone/>
+              <a:tabLst/>
+              <a:defRPr/>
+            </a:pPr>
+            <a:r>
+              <a:rPr lang="ja-JP" altLang="en-US" dirty="0"/>
+              <a:t>新規</a:t>
+            </a:r>
+            <a:r>
+              <a:rPr lang="en-US" altLang="ja-JP" dirty="0"/>
+              <a:t>/</a:t>
+            </a:r>
+            <a:r>
+              <a:rPr lang="ja-JP" altLang="en-US"/>
+              <a:t>既存の顧客に一つ階層をブレイクダウンできる。</a:t>
+            </a:r>
+            <a:endParaRPr lang="en-US" altLang="ja-JP" dirty="0"/>
+          </a:p>
+          <a:p>
             <a:endParaRPr kumimoji="1" lang="ja-JP" altLang="en-US" dirty="0"/>
           </a:p>
         </p:txBody>
@@ -855,7 +907,7 @@
             <a:fld id="{C01B8CA8-A7CC-40E4-8ED6-81B4D5F9400B}" type="datetimeFigureOut">
               <a:rPr lang="ja-JP" altLang="en-US" smtClean="0"/>
               <a:pPr/>
-              <a:t>2026/4/12</a:t>
+              <a:t>2026/4/15</a:t>
             </a:fld>
             <a:endParaRPr lang="ja-JP" altLang="en-US"/>
           </a:p>
@@ -1281,7 +1333,7 @@
             <a:fld id="{C01B8CA8-A7CC-40E4-8ED6-81B4D5F9400B}" type="datetimeFigureOut">
               <a:rPr lang="ja-JP" altLang="en-US" smtClean="0"/>
               <a:pPr/>
-              <a:t>2026/4/12</a:t>
+              <a:t>2026/4/15</a:t>
             </a:fld>
             <a:endParaRPr lang="ja-JP" altLang="en-US"/>
           </a:p>
